--- a/pics.pptx
+++ b/pics.pptx
@@ -7,6 +7,7 @@
   <p:sldIdLst>
     <p:sldId id="257" r:id="rId3"/>
     <p:sldId id="258" r:id="rId4"/>
+    <p:sldId id="259" r:id="rId5"/>
   </p:sldIdLst>
   <p:sldSz cx="12192635" cy="5039995"/>
   <p:notesSz cx="6858000" cy="9144000"/>
@@ -18090,6 +18091,2237 @@
 </p:sld>
 </file>
 
+<file path=ppt/slides/slide3.xml><?xml version="1.0" encoding="utf-8"?>
+<p:sld xmlns:a="http://schemas.openxmlformats.org/drawingml/2006/main" xmlns:r="http://schemas.openxmlformats.org/officeDocument/2006/relationships" xmlns:p="http://schemas.openxmlformats.org/presentationml/2006/main">
+  <p:cSld>
+    <p:spTree>
+      <p:nvGrpSpPr>
+        <p:cNvPr id="1" name=""/>
+        <p:cNvGrpSpPr/>
+        <p:nvPr/>
+      </p:nvGrpSpPr>
+      <p:grpSpPr>
+        <a:xfrm>
+          <a:off x="0" y="0"/>
+          <a:ext cx="0" cy="0"/>
+          <a:chOff x="0" y="0"/>
+          <a:chExt cx="0" cy="0"/>
+        </a:xfrm>
+      </p:grpSpPr>
+      <p:pic>
+        <p:nvPicPr>
+          <p:cNvPr id="73" name="图片 72"/>
+          <p:cNvPicPr/>
+          <p:nvPr/>
+        </p:nvPicPr>
+        <p:blipFill>
+          <a:blip r:embed="rId1"/>
+          <a:stretch>
+            <a:fillRect/>
+          </a:stretch>
+        </p:blipFill>
+        <p:spPr>
+          <a:xfrm>
+            <a:off x="3362538" y="3244873"/>
+            <a:ext cx="231022" cy="168016"/>
+          </a:xfrm>
+          <a:prstGeom prst="rect">
+            <a:avLst/>
+          </a:prstGeom>
+        </p:spPr>
+      </p:pic>
+      <p:pic>
+        <p:nvPicPr>
+          <p:cNvPr id="299" name="图片 298"/>
+          <p:cNvPicPr/>
+          <p:nvPr/>
+        </p:nvPicPr>
+        <p:blipFill>
+          <a:blip r:embed="rId2"/>
+          <a:stretch>
+            <a:fillRect/>
+          </a:stretch>
+        </p:blipFill>
+        <p:spPr>
+          <a:xfrm>
+            <a:off x="2639262" y="174608"/>
+            <a:ext cx="629797" cy="629797"/>
+          </a:xfrm>
+          <a:prstGeom prst="rect">
+            <a:avLst/>
+          </a:prstGeom>
+        </p:spPr>
+      </p:pic>
+      <p:pic>
+        <p:nvPicPr>
+          <p:cNvPr id="8" name="图片 7"/>
+          <p:cNvPicPr/>
+          <p:nvPr/>
+        </p:nvPicPr>
+        <p:blipFill>
+          <a:blip r:embed="rId3"/>
+          <a:stretch>
+            <a:fillRect/>
+          </a:stretch>
+        </p:blipFill>
+        <p:spPr>
+          <a:xfrm>
+            <a:off x="2762881" y="1003887"/>
+            <a:ext cx="500285" cy="531623"/>
+          </a:xfrm>
+          <a:prstGeom prst="rect">
+            <a:avLst/>
+          </a:prstGeom>
+        </p:spPr>
+      </p:pic>
+      <p:sp>
+        <p:nvSpPr>
+          <p:cNvPr id="344" name="右箭头 343"/>
+          <p:cNvSpPr/>
+          <p:nvPr/>
+        </p:nvSpPr>
+        <p:spPr>
+          <a:xfrm>
+            <a:off x="3269094" y="416663"/>
+            <a:ext cx="466071" cy="145973"/>
+          </a:xfrm>
+          <a:prstGeom prst="rightArrow">
+            <a:avLst>
+              <a:gd name="adj1" fmla="val 50000"/>
+              <a:gd name="adj2" fmla="val 57106"/>
+            </a:avLst>
+          </a:prstGeom>
+          <a:noFill/>
+          <a:ln>
+            <a:solidFill>
+              <a:srgbClr val="646464"/>
+            </a:solidFill>
+          </a:ln>
+        </p:spPr>
+        <p:style>
+          <a:lnRef idx="2">
+            <a:schemeClr val="accent1">
+              <a:lumMod val="75000"/>
+            </a:schemeClr>
+          </a:lnRef>
+          <a:fillRef idx="1">
+            <a:schemeClr val="accent1"/>
+          </a:fillRef>
+          <a:effectRef idx="0">
+            <a:srgbClr val="FFFFFF"/>
+          </a:effectRef>
+          <a:fontRef idx="minor">
+            <a:schemeClr val="lt1"/>
+          </a:fontRef>
+        </p:style>
+        <p:txBody>
+          <a:bodyPr rtlCol="0" anchor="ctr"/>
+          <a:lstStyle/>
+          <a:p>
+            <a:pPr algn="ctr"/>
+            <a:endParaRPr lang="zh-CN" altLang="en-US" sz="1050"/>
+          </a:p>
+        </p:txBody>
+      </p:sp>
+      <p:pic>
+        <p:nvPicPr>
+          <p:cNvPr id="14" name="图片 13"/>
+          <p:cNvPicPr/>
+          <p:nvPr/>
+        </p:nvPicPr>
+        <p:blipFill>
+          <a:blip r:embed="rId4"/>
+          <a:stretch>
+            <a:fillRect/>
+          </a:stretch>
+        </p:blipFill>
+        <p:spPr>
+          <a:xfrm>
+            <a:off x="4054183" y="50669"/>
+            <a:ext cx="878658" cy="263610"/>
+          </a:xfrm>
+          <a:prstGeom prst="rect">
+            <a:avLst/>
+          </a:prstGeom>
+        </p:spPr>
+      </p:pic>
+      <p:pic>
+        <p:nvPicPr>
+          <p:cNvPr id="16" name="图片 15"/>
+          <p:cNvPicPr>
+            <a:picLocks noChangeAspect="1"/>
+          </p:cNvPicPr>
+          <p:nvPr/>
+        </p:nvPicPr>
+        <p:blipFill>
+          <a:blip r:embed="rId5"/>
+          <a:stretch>
+            <a:fillRect/>
+          </a:stretch>
+        </p:blipFill>
+        <p:spPr>
+          <a:xfrm>
+            <a:off x="4049008" y="355318"/>
+            <a:ext cx="355233" cy="330529"/>
+          </a:xfrm>
+          <a:prstGeom prst="rect">
+            <a:avLst/>
+          </a:prstGeom>
+        </p:spPr>
+      </p:pic>
+      <p:pic>
+        <p:nvPicPr>
+          <p:cNvPr id="18" name="图片 17"/>
+          <p:cNvPicPr/>
+          <p:nvPr/>
+        </p:nvPicPr>
+        <p:blipFill>
+          <a:blip r:embed="rId6"/>
+          <a:stretch>
+            <a:fillRect/>
+          </a:stretch>
+        </p:blipFill>
+        <p:spPr>
+          <a:xfrm>
+            <a:off x="4520682" y="358276"/>
+            <a:ext cx="338599" cy="338663"/>
+          </a:xfrm>
+          <a:prstGeom prst="rect">
+            <a:avLst/>
+          </a:prstGeom>
+        </p:spPr>
+      </p:pic>
+      <p:sp>
+        <p:nvSpPr>
+          <p:cNvPr id="19" name="矩形 18"/>
+          <p:cNvSpPr/>
+          <p:nvPr/>
+        </p:nvSpPr>
+        <p:spPr>
+          <a:xfrm>
+            <a:off x="3829205" y="8891"/>
+            <a:ext cx="1289859" cy="748682"/>
+          </a:xfrm>
+          <a:prstGeom prst="rect">
+            <a:avLst/>
+          </a:prstGeom>
+          <a:solidFill>
+            <a:schemeClr val="accent1">
+              <a:alpha val="25000"/>
+            </a:schemeClr>
+          </a:solidFill>
+          <a:ln>
+            <a:noFill/>
+          </a:ln>
+        </p:spPr>
+        <p:style>
+          <a:lnRef idx="2">
+            <a:schemeClr val="accent1">
+              <a:lumMod val="75000"/>
+            </a:schemeClr>
+          </a:lnRef>
+          <a:fillRef idx="1">
+            <a:schemeClr val="accent1"/>
+          </a:fillRef>
+          <a:effectRef idx="0">
+            <a:srgbClr val="FFFFFF"/>
+          </a:effectRef>
+          <a:fontRef idx="minor">
+            <a:schemeClr val="lt1"/>
+          </a:fontRef>
+        </p:style>
+        <p:txBody>
+          <a:bodyPr rtlCol="0" anchor="ctr"/>
+          <a:lstStyle/>
+          <a:p>
+            <a:pPr algn="ctr"/>
+            <a:endParaRPr lang="zh-CN" altLang="en-US" sz="1050"/>
+          </a:p>
+        </p:txBody>
+      </p:sp>
+      <p:pic>
+        <p:nvPicPr>
+          <p:cNvPr id="9" name="图片 8"/>
+          <p:cNvPicPr/>
+          <p:nvPr/>
+        </p:nvPicPr>
+        <p:blipFill>
+          <a:blip r:embed="rId7"/>
+          <a:stretch>
+            <a:fillRect/>
+          </a:stretch>
+        </p:blipFill>
+        <p:spPr>
+          <a:xfrm>
+            <a:off x="3972216" y="938003"/>
+            <a:ext cx="941287" cy="264263"/>
+          </a:xfrm>
+          <a:prstGeom prst="rect">
+            <a:avLst/>
+          </a:prstGeom>
+        </p:spPr>
+      </p:pic>
+      <p:pic>
+        <p:nvPicPr>
+          <p:cNvPr id="11" name="图片 10"/>
+          <p:cNvPicPr>
+            <a:picLocks noChangeAspect="1"/>
+          </p:cNvPicPr>
+          <p:nvPr/>
+        </p:nvPicPr>
+        <p:blipFill>
+          <a:blip r:embed="rId8"/>
+          <a:stretch>
+            <a:fillRect/>
+          </a:stretch>
+        </p:blipFill>
+        <p:spPr>
+          <a:xfrm>
+            <a:off x="4011498" y="1240441"/>
+            <a:ext cx="384668" cy="379901"/>
+          </a:xfrm>
+          <a:prstGeom prst="rect">
+            <a:avLst/>
+          </a:prstGeom>
+        </p:spPr>
+      </p:pic>
+      <p:pic>
+        <p:nvPicPr>
+          <p:cNvPr id="17" name="图片 16"/>
+          <p:cNvPicPr/>
+          <p:nvPr/>
+        </p:nvPicPr>
+        <p:blipFill>
+          <a:blip r:embed="rId9"/>
+          <a:stretch>
+            <a:fillRect/>
+          </a:stretch>
+        </p:blipFill>
+        <p:spPr>
+          <a:xfrm>
+            <a:off x="4501042" y="1268238"/>
+            <a:ext cx="339456" cy="341725"/>
+          </a:xfrm>
+          <a:prstGeom prst="rect">
+            <a:avLst/>
+          </a:prstGeom>
+        </p:spPr>
+      </p:pic>
+      <p:sp>
+        <p:nvSpPr>
+          <p:cNvPr id="20" name="矩形 19"/>
+          <p:cNvSpPr/>
+          <p:nvPr/>
+        </p:nvSpPr>
+        <p:spPr>
+          <a:xfrm>
+            <a:off x="3829205" y="899086"/>
+            <a:ext cx="1295559" cy="750535"/>
+          </a:xfrm>
+          <a:prstGeom prst="rect">
+            <a:avLst/>
+          </a:prstGeom>
+          <a:solidFill>
+            <a:schemeClr val="accent1">
+              <a:alpha val="25000"/>
+            </a:schemeClr>
+          </a:solidFill>
+          <a:ln>
+            <a:noFill/>
+          </a:ln>
+        </p:spPr>
+        <p:style>
+          <a:lnRef idx="2">
+            <a:schemeClr val="accent1">
+              <a:lumMod val="75000"/>
+            </a:schemeClr>
+          </a:lnRef>
+          <a:fillRef idx="1">
+            <a:schemeClr val="accent1"/>
+          </a:fillRef>
+          <a:effectRef idx="0">
+            <a:srgbClr val="FFFFFF"/>
+          </a:effectRef>
+          <a:fontRef idx="minor">
+            <a:schemeClr val="lt1"/>
+          </a:fontRef>
+        </p:style>
+        <p:txBody>
+          <a:bodyPr rtlCol="0" anchor="ctr"/>
+          <a:lstStyle/>
+          <a:p>
+            <a:pPr algn="ctr"/>
+            <a:endParaRPr lang="zh-CN" altLang="en-US" sz="1050"/>
+          </a:p>
+        </p:txBody>
+      </p:sp>
+      <p:sp>
+        <p:nvSpPr>
+          <p:cNvPr id="23" name="右箭头 22"/>
+          <p:cNvSpPr/>
+          <p:nvPr/>
+        </p:nvSpPr>
+        <p:spPr>
+          <a:xfrm>
+            <a:off x="3269094" y="1224327"/>
+            <a:ext cx="466071" cy="145973"/>
+          </a:xfrm>
+          <a:prstGeom prst="rightArrow">
+            <a:avLst>
+              <a:gd name="adj1" fmla="val 50000"/>
+              <a:gd name="adj2" fmla="val 57106"/>
+            </a:avLst>
+          </a:prstGeom>
+          <a:noFill/>
+          <a:ln>
+            <a:solidFill>
+              <a:srgbClr val="646464"/>
+            </a:solidFill>
+          </a:ln>
+        </p:spPr>
+        <p:style>
+          <a:lnRef idx="2">
+            <a:schemeClr val="accent1">
+              <a:lumMod val="75000"/>
+            </a:schemeClr>
+          </a:lnRef>
+          <a:fillRef idx="1">
+            <a:schemeClr val="accent1"/>
+          </a:fillRef>
+          <a:effectRef idx="0">
+            <a:srgbClr val="FFFFFF"/>
+          </a:effectRef>
+          <a:fontRef idx="minor">
+            <a:schemeClr val="lt1"/>
+          </a:fontRef>
+        </p:style>
+        <p:txBody>
+          <a:bodyPr rtlCol="0" anchor="ctr"/>
+          <a:lstStyle/>
+          <a:p>
+            <a:pPr algn="ctr"/>
+            <a:endParaRPr lang="zh-CN" altLang="en-US" sz="1050"/>
+          </a:p>
+        </p:txBody>
+      </p:sp>
+      <p:sp>
+        <p:nvSpPr>
+          <p:cNvPr id="24" name="右箭头 23"/>
+          <p:cNvSpPr/>
+          <p:nvPr/>
+        </p:nvSpPr>
+        <p:spPr>
+          <a:xfrm>
+            <a:off x="5162301" y="399250"/>
+            <a:ext cx="375675" cy="145973"/>
+          </a:xfrm>
+          <a:prstGeom prst="rightArrow">
+            <a:avLst>
+              <a:gd name="adj1" fmla="val 50000"/>
+              <a:gd name="adj2" fmla="val 57106"/>
+            </a:avLst>
+          </a:prstGeom>
+          <a:noFill/>
+          <a:ln>
+            <a:solidFill>
+              <a:srgbClr val="646464"/>
+            </a:solidFill>
+          </a:ln>
+        </p:spPr>
+        <p:style>
+          <a:lnRef idx="2">
+            <a:schemeClr val="accent1">
+              <a:lumMod val="75000"/>
+            </a:schemeClr>
+          </a:lnRef>
+          <a:fillRef idx="1">
+            <a:schemeClr val="accent1"/>
+          </a:fillRef>
+          <a:effectRef idx="0">
+            <a:srgbClr val="FFFFFF"/>
+          </a:effectRef>
+          <a:fontRef idx="minor">
+            <a:schemeClr val="lt1"/>
+          </a:fontRef>
+        </p:style>
+        <p:txBody>
+          <a:bodyPr rtlCol="0" anchor="ctr"/>
+          <a:lstStyle/>
+          <a:p>
+            <a:pPr algn="ctr"/>
+            <a:endParaRPr lang="zh-CN" altLang="en-US" sz="1050"/>
+          </a:p>
+        </p:txBody>
+      </p:sp>
+      <p:sp>
+        <p:nvSpPr>
+          <p:cNvPr id="25" name="右箭头 24"/>
+          <p:cNvSpPr/>
+          <p:nvPr/>
+        </p:nvSpPr>
+        <p:spPr>
+          <a:xfrm>
+            <a:off x="5170822" y="1206915"/>
+            <a:ext cx="375675" cy="145973"/>
+          </a:xfrm>
+          <a:prstGeom prst="rightArrow">
+            <a:avLst>
+              <a:gd name="adj1" fmla="val 50000"/>
+              <a:gd name="adj2" fmla="val 57106"/>
+            </a:avLst>
+          </a:prstGeom>
+          <a:noFill/>
+          <a:ln>
+            <a:solidFill>
+              <a:srgbClr val="646464"/>
+            </a:solidFill>
+          </a:ln>
+        </p:spPr>
+        <p:style>
+          <a:lnRef idx="2">
+            <a:schemeClr val="accent1">
+              <a:lumMod val="75000"/>
+            </a:schemeClr>
+          </a:lnRef>
+          <a:fillRef idx="1">
+            <a:schemeClr val="accent1"/>
+          </a:fillRef>
+          <a:effectRef idx="0">
+            <a:srgbClr val="FFFFFF"/>
+          </a:effectRef>
+          <a:fontRef idx="minor">
+            <a:schemeClr val="lt1"/>
+          </a:fontRef>
+        </p:style>
+        <p:txBody>
+          <a:bodyPr rtlCol="0" anchor="ctr"/>
+          <a:lstStyle/>
+          <a:p>
+            <a:pPr algn="ctr"/>
+            <a:endParaRPr lang="zh-CN" altLang="en-US" sz="1050"/>
+          </a:p>
+        </p:txBody>
+      </p:sp>
+      <p:pic>
+        <p:nvPicPr>
+          <p:cNvPr id="26" name="图片 25" descr="brain"/>
+          <p:cNvPicPr>
+            <a:picLocks noChangeAspect="1"/>
+          </p:cNvPicPr>
+          <p:nvPr/>
+        </p:nvPicPr>
+        <p:blipFill>
+          <a:blip r:embed="rId10"/>
+          <a:stretch>
+            <a:fillRect/>
+          </a:stretch>
+        </p:blipFill>
+        <p:spPr>
+          <a:xfrm>
+            <a:off x="2834008" y="2616331"/>
+            <a:ext cx="404552" cy="404552"/>
+          </a:xfrm>
+          <a:prstGeom prst="rect">
+            <a:avLst/>
+          </a:prstGeom>
+        </p:spPr>
+      </p:pic>
+      <p:pic>
+        <p:nvPicPr>
+          <p:cNvPr id="27" name="图片 26"/>
+          <p:cNvPicPr>
+            <a:picLocks noChangeAspect="1"/>
+          </p:cNvPicPr>
+          <p:nvPr/>
+        </p:nvPicPr>
+        <p:blipFill>
+          <a:blip r:embed="rId11"/>
+          <a:stretch>
+            <a:fillRect/>
+          </a:stretch>
+        </p:blipFill>
+        <p:spPr>
+          <a:xfrm>
+            <a:off x="2777997" y="3041367"/>
+            <a:ext cx="514326" cy="531623"/>
+          </a:xfrm>
+          <a:prstGeom prst="rect">
+            <a:avLst/>
+          </a:prstGeom>
+        </p:spPr>
+      </p:pic>
+      <p:sp>
+        <p:nvSpPr>
+          <p:cNvPr id="33" name="文本框 32"/>
+          <p:cNvSpPr txBox="1"/>
+          <p:nvPr/>
+        </p:nvSpPr>
+        <p:spPr>
+          <a:xfrm>
+            <a:off x="3261360" y="252095"/>
+            <a:ext cx="478790" cy="216535"/>
+          </a:xfrm>
+          <a:prstGeom prst="rect">
+            <a:avLst/>
+          </a:prstGeom>
+          <a:noFill/>
+        </p:spPr>
+        <p:txBody>
+          <a:bodyPr wrap="square" rtlCol="0">
+            <a:spAutoFit/>
+          </a:bodyPr>
+          <a:lstStyle/>
+          <a:p>
+            <a:r>
+              <a:rPr lang="en-US" altLang="zh-CN" sz="815">
+                <a:latin typeface="Times New Roman" panose="02020603050405020304" charset="0"/>
+                <a:cs typeface="Times New Roman" panose="02020603050405020304" charset="0"/>
+              </a:rPr>
+              <a:t>LLMs</a:t>
+            </a:r>
+            <a:endParaRPr lang="en-US" altLang="zh-CN" sz="815">
+              <a:latin typeface="Times New Roman" panose="02020603050405020304" charset="0"/>
+              <a:cs typeface="Times New Roman" panose="02020603050405020304" charset="0"/>
+            </a:endParaRPr>
+          </a:p>
+        </p:txBody>
+      </p:sp>
+      <p:sp>
+        <p:nvSpPr>
+          <p:cNvPr id="34" name="文本框 33"/>
+          <p:cNvSpPr txBox="1"/>
+          <p:nvPr/>
+        </p:nvSpPr>
+        <p:spPr>
+          <a:xfrm>
+            <a:off x="3270250" y="1064260"/>
+            <a:ext cx="491490" cy="216535"/>
+          </a:xfrm>
+          <a:prstGeom prst="rect">
+            <a:avLst/>
+          </a:prstGeom>
+          <a:noFill/>
+        </p:spPr>
+        <p:txBody>
+          <a:bodyPr wrap="square" rtlCol="0">
+            <a:spAutoFit/>
+          </a:bodyPr>
+          <a:lstStyle/>
+          <a:p>
+            <a:r>
+              <a:rPr lang="en-US" altLang="zh-CN" sz="815" dirty="0">
+                <a:latin typeface="Times New Roman" panose="02020603050405020304" charset="0"/>
+                <a:cs typeface="Times New Roman" panose="02020603050405020304" charset="0"/>
+              </a:rPr>
+              <a:t>LVMs</a:t>
+            </a:r>
+            <a:endParaRPr lang="en-US" altLang="zh-CN" sz="815" dirty="0">
+              <a:latin typeface="Times New Roman" panose="02020603050405020304" charset="0"/>
+              <a:cs typeface="Times New Roman" panose="02020603050405020304" charset="0"/>
+            </a:endParaRPr>
+          </a:p>
+        </p:txBody>
+      </p:sp>
+      <p:pic>
+        <p:nvPicPr>
+          <p:cNvPr id="44" name="图片 43"/>
+          <p:cNvPicPr/>
+          <p:nvPr/>
+        </p:nvPicPr>
+        <p:blipFill>
+          <a:blip r:embed="rId12"/>
+          <a:stretch>
+            <a:fillRect/>
+          </a:stretch>
+        </p:blipFill>
+        <p:spPr>
+          <a:xfrm>
+            <a:off x="4116868" y="3805971"/>
+            <a:ext cx="714672" cy="714671"/>
+          </a:xfrm>
+          <a:prstGeom prst="rect">
+            <a:avLst/>
+          </a:prstGeom>
+        </p:spPr>
+      </p:pic>
+      <p:sp>
+        <p:nvSpPr>
+          <p:cNvPr id="43" name="矩形 42"/>
+          <p:cNvSpPr/>
+          <p:nvPr/>
+        </p:nvSpPr>
+        <p:spPr>
+          <a:xfrm>
+            <a:off x="3997402" y="3824884"/>
+            <a:ext cx="970324" cy="599178"/>
+          </a:xfrm>
+          <a:prstGeom prst="rect">
+            <a:avLst/>
+          </a:prstGeom>
+          <a:solidFill>
+            <a:schemeClr val="accent1">
+              <a:alpha val="25000"/>
+            </a:schemeClr>
+          </a:solidFill>
+          <a:ln>
+            <a:noFill/>
+          </a:ln>
+        </p:spPr>
+        <p:style>
+          <a:lnRef idx="2">
+            <a:schemeClr val="accent1">
+              <a:lumMod val="75000"/>
+            </a:schemeClr>
+          </a:lnRef>
+          <a:fillRef idx="1">
+            <a:schemeClr val="accent1"/>
+          </a:fillRef>
+          <a:effectRef idx="0">
+            <a:srgbClr val="FFFFFF"/>
+          </a:effectRef>
+          <a:fontRef idx="minor">
+            <a:schemeClr val="lt1"/>
+          </a:fontRef>
+        </p:style>
+        <p:txBody>
+          <a:bodyPr rtlCol="0" anchor="ctr"/>
+          <a:lstStyle/>
+          <a:p>
+            <a:pPr algn="ctr"/>
+            <a:endParaRPr lang="zh-CN" altLang="en-US" sz="1050"/>
+          </a:p>
+        </p:txBody>
+      </p:sp>
+      <p:sp>
+        <p:nvSpPr>
+          <p:cNvPr id="50" name="文本框 49"/>
+          <p:cNvSpPr txBox="1"/>
+          <p:nvPr/>
+        </p:nvSpPr>
+        <p:spPr>
+          <a:xfrm>
+            <a:off x="3643069" y="3550648"/>
+            <a:ext cx="1668638" cy="199322"/>
+          </a:xfrm>
+          <a:prstGeom prst="rect">
+            <a:avLst/>
+          </a:prstGeom>
+          <a:noFill/>
+        </p:spPr>
+        <p:txBody>
+          <a:bodyPr wrap="square" rtlCol="0">
+            <a:noAutofit/>
+          </a:bodyPr>
+          <a:lstStyle/>
+          <a:p>
+            <a:r>
+              <a:rPr lang="en-US" altLang="zh-CN" sz="815" b="1" dirty="0">
+                <a:solidFill>
+                  <a:schemeClr val="accent1"/>
+                </a:solidFill>
+                <a:latin typeface="Times New Roman" panose="02020603050405020304" charset="0"/>
+                <a:ea typeface="微软雅黑" panose="020B0503020204020204" charset="-122"/>
+                <a:cs typeface="Times New Roman" panose="02020603050405020304" charset="0"/>
+                <a:sym typeface="+mn-ea"/>
+              </a:rPr>
+              <a:t>Challenge</a:t>
+            </a:r>
+            <a:r>
+              <a:rPr lang="en-US" altLang="zh-CN" sz="815" dirty="0">
+                <a:latin typeface="Times New Roman" panose="02020603050405020304" charset="0"/>
+                <a:ea typeface="微软雅黑" panose="020B0503020204020204" charset="-122"/>
+                <a:cs typeface="Times New Roman" panose="02020603050405020304" charset="0"/>
+                <a:sym typeface="+mn-ea"/>
+              </a:rPr>
+              <a:t>: </a:t>
+            </a:r>
+            <a:r>
+              <a:rPr lang="en-US" altLang="zh-CN" sz="815" b="1" dirty="0">
+                <a:solidFill>
+                  <a:srgbClr val="FF0000"/>
+                </a:solidFill>
+                <a:latin typeface="Times New Roman" panose="02020603050405020304" charset="0"/>
+                <a:cs typeface="Times New Roman" panose="02020603050405020304" charset="0"/>
+              </a:rPr>
+              <a:t>No</a:t>
+            </a:r>
+            <a:r>
+              <a:rPr lang="en-US" altLang="zh-CN" sz="815" dirty="0">
+                <a:latin typeface="Times New Roman" panose="02020603050405020304" charset="0"/>
+                <a:cs typeface="Times New Roman" panose="02020603050405020304" charset="0"/>
+              </a:rPr>
+              <a:t> Professional</a:t>
+            </a:r>
+            <a:r>
+              <a:rPr lang="zh-CN" altLang="en-US" sz="815" dirty="0">
+                <a:latin typeface="Times New Roman" panose="02020603050405020304" charset="0"/>
+                <a:cs typeface="Times New Roman" panose="02020603050405020304" charset="0"/>
+              </a:rPr>
+              <a:t> </a:t>
+            </a:r>
+            <a:r>
+              <a:rPr lang="en-US" altLang="zh-CN" sz="815" dirty="0">
+                <a:latin typeface="Times New Roman" panose="02020603050405020304" charset="0"/>
+                <a:cs typeface="Times New Roman" panose="02020603050405020304" charset="0"/>
+              </a:rPr>
+              <a:t>Large Brain</a:t>
+            </a:r>
+            <a:r>
+              <a:rPr lang="zh-CN" altLang="en-US" sz="815" dirty="0">
+                <a:latin typeface="Times New Roman" panose="02020603050405020304" charset="0"/>
+                <a:cs typeface="Times New Roman" panose="02020603050405020304" charset="0"/>
+              </a:rPr>
+              <a:t> </a:t>
+            </a:r>
+            <a:r>
+              <a:rPr lang="en-US" altLang="zh-CN" sz="815" dirty="0">
+                <a:latin typeface="Times New Roman" panose="02020603050405020304" charset="0"/>
+                <a:cs typeface="Times New Roman" panose="02020603050405020304" charset="0"/>
+              </a:rPr>
+              <a:t>Model</a:t>
+            </a:r>
+            <a:endParaRPr lang="en-US" altLang="zh-CN" sz="815" dirty="0">
+              <a:latin typeface="Times New Roman" panose="02020603050405020304" charset="0"/>
+              <a:cs typeface="Times New Roman" panose="02020603050405020304" charset="0"/>
+            </a:endParaRPr>
+          </a:p>
+          <a:p>
+            <a:endParaRPr lang="en-US" altLang="zh-CN" sz="815" dirty="0">
+              <a:solidFill>
+                <a:schemeClr val="tx1"/>
+              </a:solidFill>
+              <a:latin typeface="Times New Roman" panose="02020603050405020304" charset="0"/>
+              <a:ea typeface="微软雅黑" panose="020B0503020204020204" charset="-122"/>
+              <a:cs typeface="Times New Roman" panose="02020603050405020304" charset="0"/>
+            </a:endParaRPr>
+          </a:p>
+          <a:p>
+            <a:endParaRPr lang="zh-CN" altLang="en-US" sz="815" dirty="0">
+              <a:latin typeface="Times New Roman" panose="02020603050405020304" charset="0"/>
+              <a:ea typeface="微软雅黑" panose="020B0503020204020204" charset="-122"/>
+              <a:cs typeface="Times New Roman" panose="02020603050405020304" charset="0"/>
+              <a:sym typeface="+mn-ea"/>
+            </a:endParaRPr>
+          </a:p>
+        </p:txBody>
+      </p:sp>
+      <p:sp>
+        <p:nvSpPr>
+          <p:cNvPr id="51" name="文本框 50"/>
+          <p:cNvSpPr txBox="1"/>
+          <p:nvPr/>
+        </p:nvSpPr>
+        <p:spPr>
+          <a:xfrm>
+            <a:off x="3677867" y="1746276"/>
+            <a:ext cx="1633840" cy="216535"/>
+          </a:xfrm>
+          <a:prstGeom prst="rect">
+            <a:avLst/>
+          </a:prstGeom>
+          <a:noFill/>
+        </p:spPr>
+        <p:txBody>
+          <a:bodyPr wrap="square" rtlCol="0">
+            <a:spAutoFit/>
+          </a:bodyPr>
+          <a:lstStyle/>
+          <a:p>
+            <a:r>
+              <a:rPr lang="en-US" altLang="zh-CN" sz="815" b="1" dirty="0">
+                <a:solidFill>
+                  <a:schemeClr val="accent1"/>
+                </a:solidFill>
+                <a:latin typeface="Times New Roman" panose="02020603050405020304" charset="0"/>
+                <a:ea typeface="微软雅黑" panose="020B0503020204020204" charset="-122"/>
+                <a:cs typeface="Times New Roman" panose="02020603050405020304" charset="0"/>
+                <a:sym typeface="+mn-ea"/>
+              </a:rPr>
+              <a:t>Challenge</a:t>
+            </a:r>
+            <a:r>
+              <a:rPr lang="en-US" altLang="zh-CN" sz="815" dirty="0">
+                <a:latin typeface="Times New Roman" panose="02020603050405020304" charset="0"/>
+                <a:ea typeface="微软雅黑" panose="020B0503020204020204" charset="-122"/>
+                <a:cs typeface="Times New Roman" panose="02020603050405020304" charset="0"/>
+                <a:sym typeface="+mn-ea"/>
+              </a:rPr>
+              <a:t>: EEG</a:t>
+            </a:r>
+            <a:r>
+              <a:rPr lang="zh-CN" altLang="en-US" sz="815" dirty="0">
+                <a:latin typeface="Times New Roman" panose="02020603050405020304" charset="0"/>
+                <a:ea typeface="微软雅黑" panose="020B0503020204020204" charset="-122"/>
+                <a:cs typeface="Times New Roman" panose="02020603050405020304" charset="0"/>
+                <a:sym typeface="+mn-ea"/>
+              </a:rPr>
+              <a:t> </a:t>
+            </a:r>
+            <a:r>
+              <a:rPr lang="en-US" altLang="zh-CN" sz="815" dirty="0">
+                <a:latin typeface="Times New Roman" panose="02020603050405020304" charset="0"/>
+                <a:ea typeface="微软雅黑" panose="020B0503020204020204" charset="-122"/>
+                <a:cs typeface="Times New Roman" panose="02020603050405020304" charset="0"/>
+                <a:sym typeface="+mn-ea"/>
+              </a:rPr>
+              <a:t>Data</a:t>
+            </a:r>
+            <a:r>
+              <a:rPr lang="zh-CN" altLang="en-US" sz="815" dirty="0">
+                <a:latin typeface="Times New Roman" panose="02020603050405020304" charset="0"/>
+                <a:ea typeface="微软雅黑" panose="020B0503020204020204" charset="-122"/>
+                <a:cs typeface="Times New Roman" panose="02020603050405020304" charset="0"/>
+                <a:sym typeface="+mn-ea"/>
+              </a:rPr>
+              <a:t> </a:t>
+            </a:r>
+            <a:r>
+              <a:rPr lang="en-US" altLang="zh-CN" sz="815" dirty="0">
+                <a:latin typeface="Times New Roman" panose="02020603050405020304" charset="0"/>
+                <a:ea typeface="微软雅黑" panose="020B0503020204020204" charset="-122"/>
+                <a:cs typeface="Times New Roman" panose="02020603050405020304" charset="0"/>
+                <a:sym typeface="+mn-ea"/>
+              </a:rPr>
+              <a:t>Scarcity</a:t>
+            </a:r>
+            <a:endParaRPr lang="en-US" altLang="zh-CN" sz="815" dirty="0">
+              <a:latin typeface="Times New Roman" panose="02020603050405020304" charset="0"/>
+              <a:ea typeface="微软雅黑" panose="020B0503020204020204" charset="-122"/>
+              <a:cs typeface="Times New Roman" panose="02020603050405020304" charset="0"/>
+              <a:sym typeface="+mn-ea"/>
+            </a:endParaRPr>
+          </a:p>
+        </p:txBody>
+      </p:sp>
+      <p:pic>
+        <p:nvPicPr>
+          <p:cNvPr id="53" name="图片 52"/>
+          <p:cNvPicPr>
+            <a:picLocks noChangeAspect="1"/>
+          </p:cNvPicPr>
+          <p:nvPr/>
+        </p:nvPicPr>
+        <p:blipFill>
+          <a:blip r:embed="rId13"/>
+          <a:stretch>
+            <a:fillRect/>
+          </a:stretch>
+        </p:blipFill>
+        <p:spPr>
+          <a:xfrm>
+            <a:off x="3724485" y="1900370"/>
+            <a:ext cx="383455" cy="505716"/>
+          </a:xfrm>
+          <a:prstGeom prst="rect">
+            <a:avLst/>
+          </a:prstGeom>
+        </p:spPr>
+      </p:pic>
+      <p:pic>
+        <p:nvPicPr>
+          <p:cNvPr id="54" name="图片 53"/>
+          <p:cNvPicPr>
+            <a:picLocks noChangeAspect="1"/>
+          </p:cNvPicPr>
+          <p:nvPr/>
+        </p:nvPicPr>
+        <p:blipFill>
+          <a:blip r:embed="rId14"/>
+          <a:stretch>
+            <a:fillRect/>
+          </a:stretch>
+        </p:blipFill>
+        <p:spPr>
+          <a:xfrm>
+            <a:off x="4148387" y="1988017"/>
+            <a:ext cx="430291" cy="397692"/>
+          </a:xfrm>
+          <a:prstGeom prst="rect">
+            <a:avLst/>
+          </a:prstGeom>
+        </p:spPr>
+      </p:pic>
+      <p:pic>
+        <p:nvPicPr>
+          <p:cNvPr id="55" name="图片 54"/>
+          <p:cNvPicPr>
+            <a:picLocks noChangeAspect="1"/>
+          </p:cNvPicPr>
+          <p:nvPr/>
+        </p:nvPicPr>
+        <p:blipFill>
+          <a:blip r:embed="rId15"/>
+          <a:stretch>
+            <a:fillRect/>
+          </a:stretch>
+        </p:blipFill>
+        <p:spPr>
+          <a:xfrm>
+            <a:off x="4876759" y="2168398"/>
+            <a:ext cx="256003" cy="205363"/>
+          </a:xfrm>
+          <a:prstGeom prst="rect">
+            <a:avLst/>
+          </a:prstGeom>
+          <a:ln>
+            <a:noFill/>
+          </a:ln>
+        </p:spPr>
+      </p:pic>
+      <p:sp>
+        <p:nvSpPr>
+          <p:cNvPr id="59" name="文本框 58"/>
+          <p:cNvSpPr txBox="1"/>
+          <p:nvPr/>
+        </p:nvSpPr>
+        <p:spPr>
+          <a:xfrm>
+            <a:off x="3626683" y="2415929"/>
+            <a:ext cx="1096108" cy="306705"/>
+          </a:xfrm>
+          <a:prstGeom prst="rect">
+            <a:avLst/>
+          </a:prstGeom>
+          <a:noFill/>
+        </p:spPr>
+        <p:txBody>
+          <a:bodyPr wrap="square" rtlCol="0">
+            <a:spAutoFit/>
+          </a:bodyPr>
+          <a:lstStyle/>
+          <a:p>
+            <a:pPr algn="ctr"/>
+            <a:r>
+              <a:rPr lang="en-US" altLang="zh-CN" sz="700" dirty="0">
+                <a:latin typeface="Times New Roman" panose="02020603050405020304" charset="0"/>
+                <a:cs typeface="Times New Roman" panose="02020603050405020304" charset="0"/>
+              </a:rPr>
+              <a:t>Huge</a:t>
+            </a:r>
+            <a:r>
+              <a:rPr lang="zh-CN" altLang="en-US" sz="700" dirty="0">
+                <a:latin typeface="Times New Roman" panose="02020603050405020304" charset="0"/>
+                <a:cs typeface="Times New Roman" panose="02020603050405020304" charset="0"/>
+              </a:rPr>
+              <a:t> </a:t>
+            </a:r>
+            <a:r>
+              <a:rPr lang="en-US" altLang="zh-CN" sz="700" dirty="0">
+                <a:latin typeface="Times New Roman" panose="02020603050405020304" charset="0"/>
+                <a:cs typeface="Times New Roman" panose="02020603050405020304" charset="0"/>
+              </a:rPr>
+              <a:t>Text and</a:t>
+            </a:r>
+            <a:r>
+              <a:rPr lang="zh-CN" altLang="en-US" sz="700" dirty="0">
+                <a:latin typeface="Times New Roman" panose="02020603050405020304" charset="0"/>
+                <a:cs typeface="Times New Roman" panose="02020603050405020304" charset="0"/>
+              </a:rPr>
+              <a:t> </a:t>
+            </a:r>
+            <a:r>
+              <a:rPr lang="en-US" altLang="zh-CN" sz="700" dirty="0">
+                <a:latin typeface="Times New Roman" panose="02020603050405020304" charset="0"/>
+                <a:cs typeface="Times New Roman" panose="02020603050405020304" charset="0"/>
+              </a:rPr>
+              <a:t>Image</a:t>
+            </a:r>
+            <a:r>
+              <a:rPr lang="zh-CN" altLang="en-US" sz="700" dirty="0">
+                <a:latin typeface="Times New Roman" panose="02020603050405020304" charset="0"/>
+                <a:cs typeface="Times New Roman" panose="02020603050405020304" charset="0"/>
+              </a:rPr>
+              <a:t> </a:t>
+            </a:r>
+            <a:r>
+              <a:rPr lang="en-US" altLang="zh-CN" sz="700" dirty="0">
+                <a:latin typeface="Times New Roman" panose="02020603050405020304" charset="0"/>
+                <a:cs typeface="Times New Roman" panose="02020603050405020304" charset="0"/>
+              </a:rPr>
+              <a:t>Data</a:t>
+            </a:r>
+            <a:endParaRPr lang="en-US" altLang="zh-CN" sz="700" dirty="0">
+              <a:latin typeface="Times New Roman" panose="02020603050405020304" charset="0"/>
+              <a:cs typeface="Times New Roman" panose="02020603050405020304" charset="0"/>
+            </a:endParaRPr>
+          </a:p>
+        </p:txBody>
+      </p:sp>
+      <p:sp>
+        <p:nvSpPr>
+          <p:cNvPr id="61" name="文本框 60"/>
+          <p:cNvSpPr txBox="1"/>
+          <p:nvPr/>
+        </p:nvSpPr>
+        <p:spPr>
+          <a:xfrm>
+            <a:off x="4629938" y="2411843"/>
+            <a:ext cx="762567" cy="198755"/>
+          </a:xfrm>
+          <a:prstGeom prst="rect">
+            <a:avLst/>
+          </a:prstGeom>
+          <a:noFill/>
+        </p:spPr>
+        <p:txBody>
+          <a:bodyPr wrap="square" rtlCol="0">
+            <a:spAutoFit/>
+          </a:bodyPr>
+          <a:lstStyle/>
+          <a:p>
+            <a:pPr algn="ctr"/>
+            <a:r>
+              <a:rPr lang="en-US" altLang="zh-CN" sz="700" b="1" dirty="0">
+                <a:solidFill>
+                  <a:srgbClr val="FF0000"/>
+                </a:solidFill>
+                <a:latin typeface="Times New Roman" panose="02020603050405020304" charset="0"/>
+                <a:cs typeface="Times New Roman" panose="02020603050405020304" charset="0"/>
+              </a:rPr>
+              <a:t>Rare</a:t>
+            </a:r>
+            <a:r>
+              <a:rPr lang="zh-CN" altLang="en-US" sz="700" dirty="0">
+                <a:latin typeface="Times New Roman" panose="02020603050405020304" charset="0"/>
+                <a:cs typeface="Times New Roman" panose="02020603050405020304" charset="0"/>
+              </a:rPr>
+              <a:t> </a:t>
+            </a:r>
+            <a:r>
+              <a:rPr lang="en-US" altLang="zh-CN" sz="700" dirty="0">
+                <a:latin typeface="Times New Roman" panose="02020603050405020304" charset="0"/>
+                <a:cs typeface="Times New Roman" panose="02020603050405020304" charset="0"/>
+              </a:rPr>
+              <a:t>EEG Data</a:t>
+            </a:r>
+            <a:endParaRPr lang="en-US" altLang="zh-CN" sz="700" dirty="0">
+              <a:latin typeface="Times New Roman" panose="02020603050405020304" charset="0"/>
+              <a:cs typeface="Times New Roman" panose="02020603050405020304" charset="0"/>
+            </a:endParaRPr>
+          </a:p>
+        </p:txBody>
+      </p:sp>
+      <p:sp>
+        <p:nvSpPr>
+          <p:cNvPr id="63" name="右箭头 62"/>
+          <p:cNvSpPr/>
+          <p:nvPr/>
+        </p:nvSpPr>
+        <p:spPr>
+          <a:xfrm>
+            <a:off x="5408172" y="3058861"/>
+            <a:ext cx="481783" cy="145973"/>
+          </a:xfrm>
+          <a:prstGeom prst="rightArrow">
+            <a:avLst>
+              <a:gd name="adj1" fmla="val 50000"/>
+              <a:gd name="adj2" fmla="val 57106"/>
+            </a:avLst>
+          </a:prstGeom>
+          <a:noFill/>
+          <a:ln>
+            <a:solidFill>
+              <a:srgbClr val="646464"/>
+            </a:solidFill>
+          </a:ln>
+        </p:spPr>
+        <p:style>
+          <a:lnRef idx="2">
+            <a:schemeClr val="accent1">
+              <a:lumMod val="75000"/>
+            </a:schemeClr>
+          </a:lnRef>
+          <a:fillRef idx="1">
+            <a:schemeClr val="accent1"/>
+          </a:fillRef>
+          <a:effectRef idx="0">
+            <a:srgbClr val="FFFFFF"/>
+          </a:effectRef>
+          <a:fontRef idx="minor">
+            <a:schemeClr val="lt1"/>
+          </a:fontRef>
+        </p:style>
+        <p:txBody>
+          <a:bodyPr rtlCol="0" anchor="ctr"/>
+          <a:lstStyle/>
+          <a:p>
+            <a:pPr algn="ctr"/>
+            <a:endParaRPr lang="zh-CN" altLang="en-US" sz="1050"/>
+          </a:p>
+        </p:txBody>
+      </p:sp>
+      <p:pic>
+        <p:nvPicPr>
+          <p:cNvPr id="64" name="图片 63"/>
+          <p:cNvPicPr/>
+          <p:nvPr/>
+        </p:nvPicPr>
+        <p:blipFill>
+          <a:blip r:embed="rId1"/>
+          <a:stretch>
+            <a:fillRect/>
+          </a:stretch>
+        </p:blipFill>
+        <p:spPr>
+          <a:xfrm>
+            <a:off x="5486881" y="3219364"/>
+            <a:ext cx="231022" cy="168016"/>
+          </a:xfrm>
+          <a:prstGeom prst="rect">
+            <a:avLst/>
+          </a:prstGeom>
+        </p:spPr>
+      </p:pic>
+      <p:pic>
+        <p:nvPicPr>
+          <p:cNvPr id="286" name="图片 285"/>
+          <p:cNvPicPr/>
+          <p:nvPr/>
+        </p:nvPicPr>
+        <p:blipFill>
+          <a:blip r:embed="rId16"/>
+          <a:stretch>
+            <a:fillRect/>
+          </a:stretch>
+        </p:blipFill>
+        <p:spPr>
+          <a:xfrm>
+            <a:off x="5842882" y="2200235"/>
+            <a:ext cx="894015" cy="513742"/>
+          </a:xfrm>
+          <a:prstGeom prst="rect">
+            <a:avLst/>
+          </a:prstGeom>
+        </p:spPr>
+      </p:pic>
+      <p:sp>
+        <p:nvSpPr>
+          <p:cNvPr id="454" name="矩形 453"/>
+          <p:cNvSpPr/>
+          <p:nvPr>
+            <p:custDataLst>
+              <p:tags r:id="rId17"/>
+            </p:custDataLst>
+          </p:nvPr>
+        </p:nvSpPr>
+        <p:spPr>
+          <a:xfrm>
+            <a:off x="5911057" y="2728912"/>
+            <a:ext cx="797290" cy="134858"/>
+          </a:xfrm>
+          <a:prstGeom prst="rect">
+            <a:avLst/>
+          </a:prstGeom>
+          <a:noFill/>
+          <a:ln w="15875">
+            <a:noFill/>
+          </a:ln>
+        </p:spPr>
+        <p:style>
+          <a:lnRef idx="0">
+            <a:srgbClr val="FFFFFF"/>
+          </a:lnRef>
+          <a:fillRef idx="1">
+            <a:schemeClr val="accent1"/>
+          </a:fillRef>
+          <a:effectRef idx="0">
+            <a:srgbClr val="FFFFFF"/>
+          </a:effectRef>
+          <a:fontRef idx="minor">
+            <a:schemeClr val="lt1"/>
+          </a:fontRef>
+        </p:style>
+        <p:txBody>
+          <a:bodyPr rtlCol="0" anchor="ctr"/>
+          <a:lstStyle/>
+          <a:p>
+            <a:pPr algn="ctr"/>
+            <a:r>
+              <a:rPr lang="en-US" altLang="zh-CN" sz="815" dirty="0">
+                <a:solidFill>
+                  <a:schemeClr val="tx1"/>
+                </a:solidFill>
+                <a:latin typeface="Times New Roman" panose="02020603050405020304" charset="0"/>
+                <a:ea typeface="微软雅黑" panose="020B0503020204020204" charset="-122"/>
+                <a:cs typeface="Times New Roman" panose="02020603050405020304" charset="0"/>
+              </a:rPr>
+              <a:t>Motor Imagery</a:t>
+            </a:r>
+            <a:endParaRPr lang="en-US" altLang="zh-CN" sz="815" dirty="0">
+              <a:solidFill>
+                <a:schemeClr val="tx1"/>
+              </a:solidFill>
+              <a:latin typeface="Times New Roman" panose="02020603050405020304" charset="0"/>
+              <a:ea typeface="微软雅黑" panose="020B0503020204020204" charset="-122"/>
+              <a:cs typeface="Times New Roman" panose="02020603050405020304" charset="0"/>
+            </a:endParaRPr>
+          </a:p>
+        </p:txBody>
+      </p:sp>
+      <p:sp>
+        <p:nvSpPr>
+          <p:cNvPr id="455" name="矩形 454"/>
+          <p:cNvSpPr/>
+          <p:nvPr>
+            <p:custDataLst>
+              <p:tags r:id="rId18"/>
+            </p:custDataLst>
+          </p:nvPr>
+        </p:nvSpPr>
+        <p:spPr>
+          <a:xfrm>
+            <a:off x="5742861" y="3458613"/>
+            <a:ext cx="1135175" cy="199323"/>
+          </a:xfrm>
+          <a:prstGeom prst="rect">
+            <a:avLst/>
+          </a:prstGeom>
+          <a:noFill/>
+          <a:ln w="15875">
+            <a:noFill/>
+          </a:ln>
+        </p:spPr>
+        <p:style>
+          <a:lnRef idx="0">
+            <a:srgbClr val="FFFFFF"/>
+          </a:lnRef>
+          <a:fillRef idx="1">
+            <a:schemeClr val="accent1"/>
+          </a:fillRef>
+          <a:effectRef idx="0">
+            <a:srgbClr val="FFFFFF"/>
+          </a:effectRef>
+          <a:fontRef idx="minor">
+            <a:schemeClr val="lt1"/>
+          </a:fontRef>
+        </p:style>
+        <p:txBody>
+          <a:bodyPr rtlCol="0" anchor="ctr"/>
+          <a:lstStyle/>
+          <a:p>
+            <a:pPr algn="ctr"/>
+            <a:r>
+              <a:rPr lang="en-US" altLang="zh-CN" sz="815" dirty="0">
+                <a:solidFill>
+                  <a:schemeClr val="tx1"/>
+                </a:solidFill>
+                <a:latin typeface="Times New Roman" panose="02020603050405020304" charset="0"/>
+                <a:ea typeface="微软雅黑" panose="020B0503020204020204" charset="-122"/>
+                <a:cs typeface="Times New Roman" panose="02020603050405020304" charset="0"/>
+              </a:rPr>
+              <a:t>Sleep-Stage Classification</a:t>
+            </a:r>
+            <a:endParaRPr lang="en-US" altLang="zh-CN" sz="815" dirty="0">
+              <a:solidFill>
+                <a:schemeClr val="tx1"/>
+              </a:solidFill>
+              <a:latin typeface="Times New Roman" panose="02020603050405020304" charset="0"/>
+              <a:ea typeface="微软雅黑" panose="020B0503020204020204" charset="-122"/>
+              <a:cs typeface="Times New Roman" panose="02020603050405020304" charset="0"/>
+            </a:endParaRPr>
+          </a:p>
+        </p:txBody>
+      </p:sp>
+      <p:pic>
+        <p:nvPicPr>
+          <p:cNvPr id="288" name="图片 287"/>
+          <p:cNvPicPr/>
+          <p:nvPr/>
+        </p:nvPicPr>
+        <p:blipFill>
+          <a:blip r:embed="rId19"/>
+          <a:srcRect b="14528"/>
+          <a:stretch>
+            <a:fillRect/>
+          </a:stretch>
+        </p:blipFill>
+        <p:spPr>
+          <a:xfrm>
+            <a:off x="5790702" y="3751837"/>
+            <a:ext cx="1063217" cy="560224"/>
+          </a:xfrm>
+          <a:prstGeom prst="rect">
+            <a:avLst/>
+          </a:prstGeom>
+        </p:spPr>
+      </p:pic>
+      <p:sp>
+        <p:nvSpPr>
+          <p:cNvPr id="456" name="矩形 455"/>
+          <p:cNvSpPr/>
+          <p:nvPr>
+            <p:custDataLst>
+              <p:tags r:id="rId20"/>
+            </p:custDataLst>
+          </p:nvPr>
+        </p:nvSpPr>
+        <p:spPr>
+          <a:xfrm>
+            <a:off x="5889956" y="4303859"/>
+            <a:ext cx="900286" cy="134858"/>
+          </a:xfrm>
+          <a:prstGeom prst="rect">
+            <a:avLst/>
+          </a:prstGeom>
+          <a:noFill/>
+          <a:ln w="15875">
+            <a:noFill/>
+          </a:ln>
+        </p:spPr>
+        <p:style>
+          <a:lnRef idx="0">
+            <a:srgbClr val="FFFFFF"/>
+          </a:lnRef>
+          <a:fillRef idx="1">
+            <a:schemeClr val="accent1"/>
+          </a:fillRef>
+          <a:effectRef idx="0">
+            <a:srgbClr val="FFFFFF"/>
+          </a:effectRef>
+          <a:fontRef idx="minor">
+            <a:schemeClr val="lt1"/>
+          </a:fontRef>
+        </p:style>
+        <p:txBody>
+          <a:bodyPr rtlCol="0" anchor="ctr"/>
+          <a:lstStyle/>
+          <a:p>
+            <a:pPr algn="ctr"/>
+            <a:r>
+              <a:rPr lang="en-US" altLang="zh-CN" sz="815" dirty="0">
+                <a:solidFill>
+                  <a:schemeClr val="tx1"/>
+                </a:solidFill>
+                <a:latin typeface="Times New Roman" panose="02020603050405020304" charset="0"/>
+                <a:ea typeface="微软雅黑" panose="020B0503020204020204" charset="-122"/>
+                <a:cs typeface="Times New Roman" panose="02020603050405020304" charset="0"/>
+              </a:rPr>
+              <a:t>Seizure Detection</a:t>
+            </a:r>
+            <a:endParaRPr lang="en-US" altLang="zh-CN" sz="815" dirty="0">
+              <a:solidFill>
+                <a:schemeClr val="tx1"/>
+              </a:solidFill>
+              <a:latin typeface="Times New Roman" panose="02020603050405020304" charset="0"/>
+              <a:ea typeface="微软雅黑" panose="020B0503020204020204" charset="-122"/>
+              <a:cs typeface="Times New Roman" panose="02020603050405020304" charset="0"/>
+            </a:endParaRPr>
+          </a:p>
+        </p:txBody>
+      </p:sp>
+      <p:sp>
+        <p:nvSpPr>
+          <p:cNvPr id="67" name="文本框 66"/>
+          <p:cNvSpPr txBox="1"/>
+          <p:nvPr/>
+        </p:nvSpPr>
+        <p:spPr>
+          <a:xfrm>
+            <a:off x="3672305" y="2712894"/>
+            <a:ext cx="1639401" cy="298984"/>
+          </a:xfrm>
+          <a:prstGeom prst="rect">
+            <a:avLst/>
+          </a:prstGeom>
+          <a:noFill/>
+        </p:spPr>
+        <p:txBody>
+          <a:bodyPr wrap="square" rtlCol="0">
+            <a:noAutofit/>
+          </a:bodyPr>
+          <a:lstStyle/>
+          <a:p>
+            <a:r>
+              <a:rPr lang="en-US" altLang="zh-CN" sz="815" b="1" dirty="0">
+                <a:solidFill>
+                  <a:schemeClr val="accent1"/>
+                </a:solidFill>
+                <a:latin typeface="Times New Roman" panose="02020603050405020304" charset="0"/>
+                <a:ea typeface="微软雅黑" panose="020B0503020204020204" charset="-122"/>
+                <a:cs typeface="Times New Roman" panose="02020603050405020304" charset="0"/>
+                <a:sym typeface="+mn-ea"/>
+              </a:rPr>
+              <a:t>Challenge</a:t>
+            </a:r>
+            <a:r>
+              <a:rPr lang="en-US" altLang="zh-CN" sz="815" dirty="0">
+                <a:latin typeface="Times New Roman" panose="02020603050405020304" charset="0"/>
+                <a:ea typeface="微软雅黑" panose="020B0503020204020204" charset="-122"/>
+                <a:cs typeface="Times New Roman" panose="02020603050405020304" charset="0"/>
+                <a:sym typeface="+mn-ea"/>
+              </a:rPr>
+              <a:t>: Unstructured and</a:t>
+            </a:r>
+            <a:r>
+              <a:rPr lang="zh-CN" altLang="en-US" sz="815" dirty="0">
+                <a:latin typeface="Times New Roman" panose="02020603050405020304" charset="0"/>
+                <a:ea typeface="微软雅黑" panose="020B0503020204020204" charset="-122"/>
+                <a:cs typeface="Times New Roman" panose="02020603050405020304" charset="0"/>
+                <a:sym typeface="+mn-ea"/>
+              </a:rPr>
+              <a:t> </a:t>
+            </a:r>
+            <a:r>
+              <a:rPr lang="en-US" altLang="zh-CN" sz="815" dirty="0">
+                <a:latin typeface="Times New Roman" panose="02020603050405020304" charset="0"/>
+                <a:ea typeface="微软雅黑" panose="020B0503020204020204" charset="-122"/>
+                <a:cs typeface="Times New Roman" panose="02020603050405020304" charset="0"/>
+                <a:sym typeface="+mn-ea"/>
+              </a:rPr>
+              <a:t>High-Dimensional</a:t>
+            </a:r>
+            <a:r>
+              <a:rPr lang="zh-CN" altLang="en-US" sz="815" dirty="0">
+                <a:latin typeface="Times New Roman" panose="02020603050405020304" charset="0"/>
+                <a:ea typeface="微软雅黑" panose="020B0503020204020204" charset="-122"/>
+                <a:cs typeface="Times New Roman" panose="02020603050405020304" charset="0"/>
+                <a:sym typeface="+mn-ea"/>
+              </a:rPr>
+              <a:t> </a:t>
+            </a:r>
+            <a:r>
+              <a:rPr lang="en-US" altLang="zh-CN" sz="815" dirty="0">
+                <a:latin typeface="Times New Roman" panose="02020603050405020304" charset="0"/>
+                <a:ea typeface="微软雅黑" panose="020B0503020204020204" charset="-122"/>
+                <a:cs typeface="Times New Roman" panose="02020603050405020304" charset="0"/>
+                <a:sym typeface="+mn-ea"/>
+              </a:rPr>
+              <a:t>EEG</a:t>
+            </a:r>
+            <a:r>
+              <a:rPr lang="zh-CN" altLang="en-US" sz="815" dirty="0">
+                <a:latin typeface="Times New Roman" panose="02020603050405020304" charset="0"/>
+                <a:ea typeface="微软雅黑" panose="020B0503020204020204" charset="-122"/>
+                <a:cs typeface="Times New Roman" panose="02020603050405020304" charset="0"/>
+                <a:sym typeface="+mn-ea"/>
+              </a:rPr>
+              <a:t> </a:t>
+            </a:r>
+            <a:r>
+              <a:rPr lang="en-US" altLang="zh-CN" sz="815" dirty="0">
+                <a:latin typeface="Times New Roman" panose="02020603050405020304" charset="0"/>
+                <a:ea typeface="微软雅黑" panose="020B0503020204020204" charset="-122"/>
+                <a:cs typeface="Times New Roman" panose="02020603050405020304" charset="0"/>
+                <a:sym typeface="+mn-ea"/>
+              </a:rPr>
+              <a:t>Data</a:t>
+            </a:r>
+            <a:endParaRPr lang="en-US" altLang="zh-CN" sz="815" dirty="0">
+              <a:solidFill>
+                <a:schemeClr val="tx1"/>
+              </a:solidFill>
+              <a:latin typeface="Times New Roman" panose="02020603050405020304" charset="0"/>
+              <a:ea typeface="微软雅黑" panose="020B0503020204020204" charset="-122"/>
+              <a:cs typeface="Times New Roman" panose="02020603050405020304" charset="0"/>
+            </a:endParaRPr>
+          </a:p>
+          <a:p>
+            <a:endParaRPr lang="zh-CN" altLang="en-US" sz="815" dirty="0">
+              <a:latin typeface="Times New Roman" panose="02020603050405020304" charset="0"/>
+              <a:ea typeface="微软雅黑" panose="020B0503020204020204" charset="-122"/>
+              <a:cs typeface="Times New Roman" panose="02020603050405020304" charset="0"/>
+              <a:sym typeface="+mn-ea"/>
+            </a:endParaRPr>
+          </a:p>
+        </p:txBody>
+      </p:sp>
+      <p:sp>
+        <p:nvSpPr>
+          <p:cNvPr id="69" name="右箭头 68"/>
+          <p:cNvSpPr/>
+          <p:nvPr/>
+        </p:nvSpPr>
+        <p:spPr>
+          <a:xfrm>
+            <a:off x="3341732" y="3098971"/>
+            <a:ext cx="324542" cy="145973"/>
+          </a:xfrm>
+          <a:prstGeom prst="rightArrow">
+            <a:avLst>
+              <a:gd name="adj1" fmla="val 50000"/>
+              <a:gd name="adj2" fmla="val 57106"/>
+            </a:avLst>
+          </a:prstGeom>
+          <a:noFill/>
+          <a:ln>
+            <a:solidFill>
+              <a:srgbClr val="646464"/>
+            </a:solidFill>
+          </a:ln>
+        </p:spPr>
+        <p:style>
+          <a:lnRef idx="2">
+            <a:schemeClr val="accent1">
+              <a:lumMod val="75000"/>
+            </a:schemeClr>
+          </a:lnRef>
+          <a:fillRef idx="1">
+            <a:schemeClr val="accent1"/>
+          </a:fillRef>
+          <a:effectRef idx="0">
+            <a:srgbClr val="FFFFFF"/>
+          </a:effectRef>
+          <a:fontRef idx="minor">
+            <a:schemeClr val="lt1"/>
+          </a:fontRef>
+        </p:style>
+        <p:txBody>
+          <a:bodyPr rtlCol="0" anchor="ctr"/>
+          <a:lstStyle/>
+          <a:p>
+            <a:pPr algn="ctr"/>
+            <a:endParaRPr lang="zh-CN" altLang="en-US" sz="1050"/>
+          </a:p>
+        </p:txBody>
+      </p:sp>
+      <p:sp>
+        <p:nvSpPr>
+          <p:cNvPr id="72" name="文本框 71"/>
+          <p:cNvSpPr txBox="1"/>
+          <p:nvPr/>
+        </p:nvSpPr>
+        <p:spPr>
+          <a:xfrm>
+            <a:off x="3309620" y="2938780"/>
+            <a:ext cx="519430" cy="216535"/>
+          </a:xfrm>
+          <a:prstGeom prst="rect">
+            <a:avLst/>
+          </a:prstGeom>
+          <a:noFill/>
+        </p:spPr>
+        <p:txBody>
+          <a:bodyPr wrap="square" rtlCol="0">
+            <a:spAutoFit/>
+          </a:bodyPr>
+          <a:lstStyle/>
+          <a:p>
+            <a:r>
+              <a:rPr lang="en-US" altLang="zh-CN" sz="815" dirty="0">
+                <a:latin typeface="Times New Roman" panose="02020603050405020304" charset="0"/>
+                <a:cs typeface="Times New Roman" panose="02020603050405020304" charset="0"/>
+              </a:rPr>
+              <a:t>LLMs</a:t>
+            </a:r>
+            <a:endParaRPr lang="en-US" altLang="zh-CN" sz="815" dirty="0">
+              <a:latin typeface="Times New Roman" panose="02020603050405020304" charset="0"/>
+              <a:cs typeface="Times New Roman" panose="02020603050405020304" charset="0"/>
+            </a:endParaRPr>
+          </a:p>
+        </p:txBody>
+      </p:sp>
+      <p:pic>
+        <p:nvPicPr>
+          <p:cNvPr id="74" name="图片 73"/>
+          <p:cNvPicPr>
+            <a:picLocks noChangeAspect="1"/>
+          </p:cNvPicPr>
+          <p:nvPr/>
+        </p:nvPicPr>
+        <p:blipFill>
+          <a:blip r:embed="rId15"/>
+          <a:stretch>
+            <a:fillRect/>
+          </a:stretch>
+        </p:blipFill>
+        <p:spPr>
+          <a:xfrm>
+            <a:off x="3761585" y="3054938"/>
+            <a:ext cx="330476" cy="330476"/>
+          </a:xfrm>
+          <a:prstGeom prst="rect">
+            <a:avLst/>
+          </a:prstGeom>
+        </p:spPr>
+      </p:pic>
+      <p:grpSp>
+        <p:nvGrpSpPr>
+          <p:cNvPr id="75" name="组合 74"/>
+          <p:cNvGrpSpPr/>
+          <p:nvPr/>
+        </p:nvGrpSpPr>
+        <p:grpSpPr>
+          <a:xfrm>
+            <a:off x="4585921" y="2984915"/>
+            <a:ext cx="642056" cy="468667"/>
+            <a:chOff x="5528" y="2647"/>
+            <a:chExt cx="2772" cy="2024"/>
+          </a:xfrm>
+        </p:grpSpPr>
+        <p:pic>
+          <p:nvPicPr>
+            <p:cNvPr id="76" name="图片 75"/>
+            <p:cNvPicPr/>
+            <p:nvPr/>
+          </p:nvPicPr>
+          <p:blipFill>
+            <a:blip r:embed="rId4"/>
+            <a:stretch>
+              <a:fillRect/>
+            </a:stretch>
+          </p:blipFill>
+          <p:spPr>
+            <a:xfrm>
+              <a:off x="5848" y="2760"/>
+              <a:ext cx="2377" cy="713"/>
+            </a:xfrm>
+            <a:prstGeom prst="rect">
+              <a:avLst/>
+            </a:prstGeom>
+          </p:spPr>
+        </p:pic>
+        <p:pic>
+          <p:nvPicPr>
+            <p:cNvPr id="77" name="图片 76"/>
+            <p:cNvPicPr>
+              <a:picLocks noChangeAspect="1"/>
+            </p:cNvPicPr>
+            <p:nvPr/>
+          </p:nvPicPr>
+          <p:blipFill>
+            <a:blip r:embed="rId5"/>
+            <a:stretch>
+              <a:fillRect/>
+            </a:stretch>
+          </p:blipFill>
+          <p:spPr>
+            <a:xfrm>
+              <a:off x="5834" y="3584"/>
+              <a:ext cx="961" cy="894"/>
+            </a:xfrm>
+            <a:prstGeom prst="rect">
+              <a:avLst/>
+            </a:prstGeom>
+          </p:spPr>
+        </p:pic>
+        <p:pic>
+          <p:nvPicPr>
+            <p:cNvPr id="78" name="图片 77"/>
+            <p:cNvPicPr/>
+            <p:nvPr/>
+          </p:nvPicPr>
+          <p:blipFill>
+            <a:blip r:embed="rId6"/>
+            <a:stretch>
+              <a:fillRect/>
+            </a:stretch>
+          </p:blipFill>
+          <p:spPr>
+            <a:xfrm>
+              <a:off x="7110" y="3592"/>
+              <a:ext cx="916" cy="916"/>
+            </a:xfrm>
+            <a:prstGeom prst="rect">
+              <a:avLst/>
+            </a:prstGeom>
+          </p:spPr>
+        </p:pic>
+        <p:sp>
+          <p:nvSpPr>
+            <p:cNvPr id="79" name="矩形 78"/>
+            <p:cNvSpPr/>
+            <p:nvPr/>
+          </p:nvSpPr>
+          <p:spPr>
+            <a:xfrm>
+              <a:off x="5528" y="2647"/>
+              <a:ext cx="2772" cy="2025"/>
+            </a:xfrm>
+            <a:prstGeom prst="rect">
+              <a:avLst/>
+            </a:prstGeom>
+            <a:solidFill>
+              <a:schemeClr val="accent1">
+                <a:alpha val="25000"/>
+              </a:schemeClr>
+            </a:solidFill>
+            <a:ln>
+              <a:noFill/>
+            </a:ln>
+          </p:spPr>
+          <p:style>
+            <a:lnRef idx="2">
+              <a:schemeClr val="accent1">
+                <a:lumMod val="75000"/>
+              </a:schemeClr>
+            </a:lnRef>
+            <a:fillRef idx="1">
+              <a:schemeClr val="accent1"/>
+            </a:fillRef>
+            <a:effectRef idx="0">
+              <a:srgbClr val="FFFFFF"/>
+            </a:effectRef>
+            <a:fontRef idx="minor">
+              <a:schemeClr val="lt1"/>
+            </a:fontRef>
+          </p:style>
+          <p:txBody>
+            <a:bodyPr rtlCol="0" anchor="ctr"/>
+            <a:lstStyle/>
+            <a:p>
+              <a:pPr algn="ctr"/>
+              <a:endParaRPr lang="zh-CN" altLang="en-US" sz="1050"/>
+            </a:p>
+          </p:txBody>
+        </p:sp>
+      </p:grpSp>
+      <p:cxnSp>
+        <p:nvCxnSpPr>
+          <p:cNvPr id="80" name="直接箭头连接符 79"/>
+          <p:cNvCxnSpPr>
+            <a:stCxn id="74" idx="3"/>
+          </p:cNvCxnSpPr>
+          <p:nvPr/>
+        </p:nvCxnSpPr>
+        <p:spPr>
+          <a:xfrm flipV="1">
+            <a:off x="4092060" y="3219434"/>
+            <a:ext cx="493861" cy="741"/>
+          </a:xfrm>
+          <a:prstGeom prst="straightConnector1">
+            <a:avLst/>
+          </a:prstGeom>
+          <a:ln>
+            <a:solidFill>
+              <a:schemeClr val="tx1"/>
+            </a:solidFill>
+            <a:tailEnd type="arrow"/>
+          </a:ln>
+        </p:spPr>
+        <p:style>
+          <a:lnRef idx="2">
+            <a:schemeClr val="accent1"/>
+          </a:lnRef>
+          <a:fillRef idx="0">
+            <a:srgbClr val="FFFFFF"/>
+          </a:fillRef>
+          <a:effectRef idx="0">
+            <a:srgbClr val="FFFFFF"/>
+          </a:effectRef>
+          <a:fontRef idx="minor">
+            <a:schemeClr val="tx1"/>
+          </a:fontRef>
+        </p:style>
+      </p:cxnSp>
+      <p:pic>
+        <p:nvPicPr>
+          <p:cNvPr id="82" name="图片 81"/>
+          <p:cNvPicPr/>
+          <p:nvPr/>
+        </p:nvPicPr>
+        <p:blipFill>
+          <a:blip r:embed="rId21"/>
+          <a:stretch>
+            <a:fillRect/>
+          </a:stretch>
+        </p:blipFill>
+        <p:spPr>
+          <a:xfrm>
+            <a:off x="4223213" y="3131629"/>
+            <a:ext cx="183762" cy="183762"/>
+          </a:xfrm>
+          <a:prstGeom prst="rect">
+            <a:avLst/>
+          </a:prstGeom>
+        </p:spPr>
+      </p:pic>
+      <p:sp>
+        <p:nvSpPr>
+          <p:cNvPr id="87" name="矩形 86"/>
+          <p:cNvSpPr/>
+          <p:nvPr/>
+        </p:nvSpPr>
+        <p:spPr>
+          <a:xfrm>
+            <a:off x="3672296" y="1759365"/>
+            <a:ext cx="1639410" cy="2689710"/>
+          </a:xfrm>
+          <a:prstGeom prst="rect">
+            <a:avLst/>
+          </a:prstGeom>
+          <a:noFill/>
+          <a:ln w="19050">
+            <a:solidFill>
+              <a:schemeClr val="tx1"/>
+            </a:solidFill>
+          </a:ln>
+        </p:spPr>
+        <p:style>
+          <a:lnRef idx="2">
+            <a:schemeClr val="accent1">
+              <a:lumMod val="75000"/>
+            </a:schemeClr>
+          </a:lnRef>
+          <a:fillRef idx="1">
+            <a:schemeClr val="accent1"/>
+          </a:fillRef>
+          <a:effectRef idx="0">
+            <a:srgbClr val="FFFFFF"/>
+          </a:effectRef>
+          <a:fontRef idx="minor">
+            <a:schemeClr val="lt1"/>
+          </a:fontRef>
+        </p:style>
+        <p:txBody>
+          <a:bodyPr rtlCol="0" anchor="ctr"/>
+          <a:lstStyle/>
+          <a:p>
+            <a:pPr algn="ctr"/>
+            <a:endParaRPr lang="zh-CN" altLang="en-US" sz="1050"/>
+          </a:p>
+        </p:txBody>
+      </p:sp>
+      <p:sp>
+        <p:nvSpPr>
+          <p:cNvPr id="89" name="文本框 88"/>
+          <p:cNvSpPr txBox="1"/>
+          <p:nvPr/>
+        </p:nvSpPr>
+        <p:spPr>
+          <a:xfrm>
+            <a:off x="5866130" y="1759585"/>
+            <a:ext cx="1012190" cy="313690"/>
+          </a:xfrm>
+          <a:prstGeom prst="rect">
+            <a:avLst/>
+          </a:prstGeom>
+          <a:noFill/>
+          <a:ln w="19050">
+            <a:solidFill>
+              <a:schemeClr val="tx1"/>
+            </a:solidFill>
+          </a:ln>
+        </p:spPr>
+        <p:txBody>
+          <a:bodyPr wrap="square" rtlCol="0">
+            <a:noAutofit/>
+          </a:bodyPr>
+          <a:lstStyle/>
+          <a:p>
+            <a:pPr algn="ctr"/>
+            <a:r>
+              <a:rPr lang="en-US" altLang="zh-CN" sz="815" dirty="0">
+                <a:latin typeface="Times New Roman" panose="02020603050405020304" charset="0"/>
+                <a:ea typeface="微软雅黑" panose="020B0503020204020204" charset="-122"/>
+                <a:cs typeface="Times New Roman" panose="02020603050405020304" charset="0"/>
+                <a:sym typeface="+mn-ea"/>
+              </a:rPr>
+              <a:t>Downstream</a:t>
+            </a:r>
+            <a:r>
+              <a:rPr lang="zh-CN" altLang="en-US" sz="815" dirty="0">
+                <a:latin typeface="Times New Roman" panose="02020603050405020304" charset="0"/>
+                <a:ea typeface="微软雅黑" panose="020B0503020204020204" charset="-122"/>
+                <a:cs typeface="Times New Roman" panose="02020603050405020304" charset="0"/>
+                <a:sym typeface="+mn-ea"/>
+              </a:rPr>
+              <a:t> </a:t>
+            </a:r>
+            <a:r>
+              <a:rPr lang="en-US" altLang="zh-CN" sz="815" dirty="0">
+                <a:latin typeface="Times New Roman" panose="02020603050405020304" charset="0"/>
+                <a:ea typeface="微软雅黑" panose="020B0503020204020204" charset="-122"/>
+                <a:cs typeface="Times New Roman" panose="02020603050405020304" charset="0"/>
+                <a:sym typeface="+mn-ea"/>
+              </a:rPr>
+              <a:t>EEG</a:t>
+            </a:r>
+            <a:r>
+              <a:rPr lang="zh-CN" altLang="en-US" sz="815" dirty="0">
+                <a:latin typeface="Times New Roman" panose="02020603050405020304" charset="0"/>
+                <a:ea typeface="微软雅黑" panose="020B0503020204020204" charset="-122"/>
+                <a:cs typeface="Times New Roman" panose="02020603050405020304" charset="0"/>
+                <a:sym typeface="+mn-ea"/>
+              </a:rPr>
+              <a:t> </a:t>
+            </a:r>
+            <a:r>
+              <a:rPr lang="en-US" altLang="zh-CN" sz="815" dirty="0">
+                <a:latin typeface="Times New Roman" panose="02020603050405020304" charset="0"/>
+                <a:ea typeface="微软雅黑" panose="020B0503020204020204" charset="-122"/>
+                <a:cs typeface="Times New Roman" panose="02020603050405020304" charset="0"/>
+                <a:sym typeface="+mn-ea"/>
+              </a:rPr>
+              <a:t>Decoding</a:t>
+            </a:r>
+            <a:r>
+              <a:rPr lang="zh-CN" altLang="en-US" sz="815" dirty="0">
+                <a:latin typeface="Times New Roman" panose="02020603050405020304" charset="0"/>
+                <a:ea typeface="微软雅黑" panose="020B0503020204020204" charset="-122"/>
+                <a:cs typeface="Times New Roman" panose="02020603050405020304" charset="0"/>
+                <a:sym typeface="+mn-ea"/>
+              </a:rPr>
+              <a:t> </a:t>
+            </a:r>
+            <a:r>
+              <a:rPr lang="en-US" altLang="zh-CN" sz="815" dirty="0">
+                <a:latin typeface="Times New Roman" panose="02020603050405020304" charset="0"/>
+                <a:ea typeface="微软雅黑" panose="020B0503020204020204" charset="-122"/>
+                <a:cs typeface="Times New Roman" panose="02020603050405020304" charset="0"/>
+                <a:sym typeface="+mn-ea"/>
+              </a:rPr>
+              <a:t>Tasks</a:t>
+            </a:r>
+            <a:endParaRPr lang="en-US" altLang="zh-CN" sz="815" dirty="0">
+              <a:latin typeface="Times New Roman" panose="02020603050405020304" charset="0"/>
+              <a:ea typeface="微软雅黑" panose="020B0503020204020204" charset="-122"/>
+              <a:cs typeface="Times New Roman" panose="02020603050405020304" charset="0"/>
+              <a:sym typeface="+mn-ea"/>
+            </a:endParaRPr>
+          </a:p>
+        </p:txBody>
+      </p:sp>
+      <p:sp>
+        <p:nvSpPr>
+          <p:cNvPr id="90" name="文本框 89"/>
+          <p:cNvSpPr txBox="1"/>
+          <p:nvPr/>
+        </p:nvSpPr>
+        <p:spPr>
+          <a:xfrm>
+            <a:off x="5621769" y="314143"/>
+            <a:ext cx="1135064" cy="336370"/>
+          </a:xfrm>
+          <a:prstGeom prst="rect">
+            <a:avLst/>
+          </a:prstGeom>
+          <a:noFill/>
+          <a:ln w="19050">
+            <a:solidFill>
+              <a:schemeClr val="tx1"/>
+            </a:solidFill>
+          </a:ln>
+        </p:spPr>
+        <p:txBody>
+          <a:bodyPr wrap="square" rtlCol="0">
+            <a:noAutofit/>
+          </a:bodyPr>
+          <a:lstStyle/>
+          <a:p>
+            <a:pPr algn="ctr"/>
+            <a:r>
+              <a:rPr lang="en-US" altLang="zh-CN" sz="815">
+                <a:latin typeface="Times New Roman" panose="02020603050405020304" charset="0"/>
+                <a:ea typeface="微软雅黑" panose="020B0503020204020204" charset="-122"/>
+                <a:cs typeface="Times New Roman" panose="02020603050405020304" charset="0"/>
+                <a:sym typeface="+mn-ea"/>
+              </a:rPr>
+              <a:t>NLP</a:t>
+            </a:r>
+            <a:endParaRPr lang="en-US" altLang="zh-CN" sz="815">
+              <a:latin typeface="Times New Roman" panose="02020603050405020304" charset="0"/>
+              <a:ea typeface="微软雅黑" panose="020B0503020204020204" charset="-122"/>
+              <a:cs typeface="Times New Roman" panose="02020603050405020304" charset="0"/>
+              <a:sym typeface="+mn-ea"/>
+            </a:endParaRPr>
+          </a:p>
+          <a:p>
+            <a:pPr algn="ctr"/>
+            <a:r>
+              <a:rPr lang="en-US" altLang="zh-CN" sz="815">
+                <a:latin typeface="Times New Roman" panose="02020603050405020304" charset="0"/>
+                <a:ea typeface="微软雅黑" panose="020B0503020204020204" charset="-122"/>
+                <a:cs typeface="Times New Roman" panose="02020603050405020304" charset="0"/>
+                <a:sym typeface="+mn-ea"/>
+              </a:rPr>
+              <a:t>Downstream Tasks</a:t>
+            </a:r>
+            <a:endParaRPr lang="en-US" altLang="zh-CN" sz="815">
+              <a:latin typeface="Times New Roman" panose="02020603050405020304" charset="0"/>
+              <a:ea typeface="微软雅黑" panose="020B0503020204020204" charset="-122"/>
+              <a:cs typeface="Times New Roman" panose="02020603050405020304" charset="0"/>
+              <a:sym typeface="+mn-ea"/>
+            </a:endParaRPr>
+          </a:p>
+        </p:txBody>
+      </p:sp>
+      <p:sp>
+        <p:nvSpPr>
+          <p:cNvPr id="91" name="文本框 90"/>
+          <p:cNvSpPr txBox="1"/>
+          <p:nvPr/>
+        </p:nvSpPr>
+        <p:spPr>
+          <a:xfrm>
+            <a:off x="5621769" y="1129137"/>
+            <a:ext cx="1135064" cy="336370"/>
+          </a:xfrm>
+          <a:prstGeom prst="rect">
+            <a:avLst/>
+          </a:prstGeom>
+          <a:noFill/>
+          <a:ln w="19050">
+            <a:solidFill>
+              <a:schemeClr val="tx1"/>
+            </a:solidFill>
+          </a:ln>
+        </p:spPr>
+        <p:txBody>
+          <a:bodyPr wrap="square" rtlCol="0">
+            <a:noAutofit/>
+          </a:bodyPr>
+          <a:lstStyle/>
+          <a:p>
+            <a:pPr algn="ctr"/>
+            <a:r>
+              <a:rPr lang="en-US" altLang="zh-CN" sz="815">
+                <a:latin typeface="Times New Roman" panose="02020603050405020304" charset="0"/>
+                <a:ea typeface="微软雅黑" panose="020B0503020204020204" charset="-122"/>
+                <a:cs typeface="Times New Roman" panose="02020603050405020304" charset="0"/>
+                <a:sym typeface="+mn-ea"/>
+              </a:rPr>
+              <a:t>CV</a:t>
+            </a:r>
+            <a:endParaRPr lang="en-US" altLang="zh-CN" sz="815">
+              <a:latin typeface="Times New Roman" panose="02020603050405020304" charset="0"/>
+              <a:ea typeface="微软雅黑" panose="020B0503020204020204" charset="-122"/>
+              <a:cs typeface="Times New Roman" panose="02020603050405020304" charset="0"/>
+              <a:sym typeface="+mn-ea"/>
+            </a:endParaRPr>
+          </a:p>
+          <a:p>
+            <a:pPr algn="ctr"/>
+            <a:r>
+              <a:rPr lang="en-US" altLang="zh-CN" sz="815">
+                <a:latin typeface="Times New Roman" panose="02020603050405020304" charset="0"/>
+                <a:ea typeface="微软雅黑" panose="020B0503020204020204" charset="-122"/>
+                <a:cs typeface="Times New Roman" panose="02020603050405020304" charset="0"/>
+                <a:sym typeface="+mn-ea"/>
+              </a:rPr>
+              <a:t>Downstream Tasks</a:t>
+            </a:r>
+            <a:endParaRPr lang="en-US" altLang="zh-CN" sz="815">
+              <a:latin typeface="Times New Roman" panose="02020603050405020304" charset="0"/>
+              <a:ea typeface="微软雅黑" panose="020B0503020204020204" charset="-122"/>
+              <a:cs typeface="Times New Roman" panose="02020603050405020304" charset="0"/>
+              <a:sym typeface="+mn-ea"/>
+            </a:endParaRPr>
+          </a:p>
+        </p:txBody>
+      </p:sp>
+      <p:sp>
+        <p:nvSpPr>
+          <p:cNvPr id="2" name="文本框 1"/>
+          <p:cNvSpPr txBox="1"/>
+          <p:nvPr/>
+        </p:nvSpPr>
+        <p:spPr>
+          <a:xfrm>
+            <a:off x="4073987" y="3309787"/>
+            <a:ext cx="589280" cy="216535"/>
+          </a:xfrm>
+          <a:prstGeom prst="rect">
+            <a:avLst/>
+          </a:prstGeom>
+          <a:noFill/>
+        </p:spPr>
+        <p:txBody>
+          <a:bodyPr wrap="none" rtlCol="0">
+            <a:spAutoFit/>
+          </a:bodyPr>
+          <a:lstStyle/>
+          <a:p>
+            <a:r>
+              <a:rPr kumimoji="1" lang="en-US" altLang="zh-CN" sz="815" dirty="0">
+                <a:latin typeface="Times New Roman" panose="02020603050405020304" charset="0"/>
+                <a:cs typeface="Times New Roman" panose="02020603050405020304" charset="0"/>
+              </a:rPr>
+              <a:t>Indirectly</a:t>
+            </a:r>
+            <a:endParaRPr kumimoji="1" lang="zh-CN" altLang="en-US" sz="815" dirty="0">
+              <a:latin typeface="Times New Roman" panose="02020603050405020304" charset="0"/>
+              <a:cs typeface="Times New Roman" panose="02020603050405020304" charset="0"/>
+            </a:endParaRPr>
+          </a:p>
+        </p:txBody>
+      </p:sp>
+      <p:pic>
+        <p:nvPicPr>
+          <p:cNvPr id="1028" name="Picture 4" descr="EEG Sleep Research » Brain Vision"/>
+          <p:cNvPicPr>
+            <a:picLocks noChangeAspect="1" noChangeArrowheads="1"/>
+          </p:cNvPicPr>
+          <p:nvPr/>
+        </p:nvPicPr>
+        <p:blipFill rotWithShape="1">
+          <a:blip r:embed="rId22">
+            <a:extLst>
+              <a:ext uri="{28A0092B-C50C-407E-A947-70E740481C1C}">
+                <a14:useLocalDpi xmlns:a14="http://schemas.microsoft.com/office/drawing/2010/main" val="0"/>
+              </a:ext>
+            </a:extLst>
+          </a:blip>
+          <a:srcRect t="23156" b="25666"/>
+          <a:stretch>
+            <a:fillRect/>
+          </a:stretch>
+        </p:blipFill>
+        <p:spPr bwMode="auto">
+          <a:xfrm>
+            <a:off x="5907437" y="2949608"/>
+            <a:ext cx="897635" cy="459399"/>
+          </a:xfrm>
+          <a:prstGeom prst="rect">
+            <a:avLst/>
+          </a:prstGeom>
+          <a:noFill/>
+          <a:extLst>
+            <a:ext uri="{909E8E84-426E-40DD-AFC4-6F175D3DCCD1}">
+              <a14:hiddenFill xmlns:a14="http://schemas.microsoft.com/office/drawing/2010/main">
+                <a:solidFill>
+                  <a:srgbClr val="FFFFFF"/>
+                </a:solidFill>
+              </a14:hiddenFill>
+            </a:ext>
+          </a:extLst>
+        </p:spPr>
+      </p:pic>
+      <p:sp>
+        <p:nvSpPr>
+          <p:cNvPr id="5" name="文本框 4"/>
+          <p:cNvSpPr txBox="1"/>
+          <p:nvPr/>
+        </p:nvSpPr>
+        <p:spPr>
+          <a:xfrm>
+            <a:off x="5293360" y="2912745"/>
+            <a:ext cx="803910" cy="198755"/>
+          </a:xfrm>
+          <a:prstGeom prst="rect">
+            <a:avLst/>
+          </a:prstGeom>
+          <a:noFill/>
+        </p:spPr>
+        <p:txBody>
+          <a:bodyPr wrap="square">
+            <a:spAutoFit/>
+          </a:bodyPr>
+          <a:lstStyle/>
+          <a:p>
+            <a:r>
+              <a:rPr lang="en-US" altLang="zh-CN" sz="700" b="1" dirty="0">
+                <a:latin typeface="Times New Roman" panose="02020603050405020304" charset="0"/>
+                <a:ea typeface="微软雅黑" panose="020B0503020204020204" charset="-122"/>
+                <a:cs typeface="Times New Roman" panose="02020603050405020304" charset="0"/>
+                <a:sym typeface="+mn-ea"/>
+              </a:rPr>
+              <a:t>Underexplored</a:t>
+            </a:r>
+            <a:endParaRPr lang="zh-CN" altLang="en-US" sz="700" b="1" dirty="0"/>
+          </a:p>
+        </p:txBody>
+      </p:sp>
+    </p:spTree>
+    <p:custDataLst>
+      <p:tags r:id="rId23"/>
+    </p:custDataLst>
+  </p:cSld>
+  <p:clrMapOvr>
+    <a:masterClrMapping/>
+  </p:clrMapOvr>
+</p:sld>
+</file>
+
 <file path=ppt/tags/tag1.xml><?xml version="1.0" encoding="utf-8"?>
 <p:tagLst xmlns:p="http://schemas.openxmlformats.org/presentationml/2006/main">
   <p:tag name="KSO_WM_UNIT_HIGHLIGHT" val="0"/>
@@ -18935,6 +21167,45 @@
 </p:tagLst>
 </file>
 
+<file path=ppt/tags/tag70.xml><?xml version="1.0" encoding="utf-8"?>
+<p:tagLst xmlns:p="http://schemas.openxmlformats.org/presentationml/2006/main">
+  <p:tag name="KSO_WM_DIAGRAM_VIRTUALLY_FRAME" val="{&quot;height&quot;:337.5,&quot;left&quot;:276.6,&quot;top&quot;:51.25,&quot;width&quot;:294.4}"/>
+</p:tagLst>
+</file>
+
+<file path=ppt/tags/tag71.xml><?xml version="1.0" encoding="utf-8"?>
+<p:tagLst xmlns:p="http://schemas.openxmlformats.org/presentationml/2006/main">
+  <p:tag name="KSO_WM_DIAGRAM_VIRTUALLY_FRAME" val="{&quot;height&quot;:337.5,&quot;left&quot;:276.6,&quot;top&quot;:51.25,&quot;width&quot;:294.4}"/>
+</p:tagLst>
+</file>
+
+<file path=ppt/tags/tag72.xml><?xml version="1.0" encoding="utf-8"?>
+<p:tagLst xmlns:p="http://schemas.openxmlformats.org/presentationml/2006/main">
+  <p:tag name="KSO_WM_DIAGRAM_VIRTUALLY_FRAME" val="{&quot;height&quot;:337.5,&quot;left&quot;:276.6,&quot;top&quot;:51.25,&quot;width&quot;:294.4}"/>
+</p:tagLst>
+</file>
+
+<file path=ppt/tags/tag73.xml><?xml version="1.0" encoding="utf-8"?>
+<p:tagLst xmlns:p="http://schemas.openxmlformats.org/presentationml/2006/main">
+  <p:tag name="KSO_WM_SLIDE_ID" val="custom20205081_1"/>
+  <p:tag name="KSO_WM_TEMPLATE_SUBCATEGORY" val="19"/>
+  <p:tag name="KSO_WM_TEMPLATE_MASTER_TYPE" val="0"/>
+  <p:tag name="KSO_WM_TEMPLATE_COLOR_TYPE" val="1"/>
+  <p:tag name="KSO_WM_SLIDE_TYPE" val="title"/>
+  <p:tag name="KSO_WM_SLIDE_SUBTYPE" val="defaultBlank"/>
+  <p:tag name="KSO_WM_SLIDE_ITEM_CNT" val="0"/>
+  <p:tag name="KSO_WM_SLIDE_INDEX" val="1"/>
+  <p:tag name="KSO_WM_TAG_VERSION" val="1.0"/>
+  <p:tag name="KSO_WM_BEAUTIFY_FLAG" val="#wm#"/>
+  <p:tag name="KSO_WM_TEMPLATE_CATEGORY" val="custom"/>
+  <p:tag name="KSO_WM_TEMPLATE_INDEX" val="20205081"/>
+  <p:tag name="KSO_WM_SLIDE_LAYOUT" val="a_b"/>
+  <p:tag name="KSO_WM_SLIDE_LAYOUT_CNT" val="1_1"/>
+  <p:tag name="KSO_WM_UNIT_SHOW_EDIT_AREA_INDICATION" val="1"/>
+  <p:tag name="KSO_WM_TEMPLATE_THUMBS_INDEX" val="1、4、7、12、13、14、15、16、17、18、20、24、25、28、33、36、40、43、44"/>
+</p:tagLst>
+</file>
+
 <file path=ppt/tags/tag8.xml><?xml version="1.0" encoding="utf-8"?>
 <p:tagLst xmlns:p="http://schemas.openxmlformats.org/presentationml/2006/main">
   <p:tag name="KSO_WM_UNIT_HIGHLIGHT" val="0"/>
